--- a/lecture_pptx/out/ワーク01_講師用.pptx
+++ b/lecture_pptx/out/ワーク01_講師用.pptx
@@ -1106,7 +1106,7 @@
                 <a:ea typeface="Yu Gothic UI Semibold" pitchFamily="34" charset="-122"/>
                 <a:cs typeface="Yu Gothic UI Semibold" pitchFamily="34" charset="-120"/>
               </a:rPr>
-              <a:t>Lovable で LP をバイブコーディング</a:t>
+              <a:t>LP 自動生成 + 公式LINE 構成設計</a:t>
             </a:r>
             <a:endParaRPr lang="en-US" sz="3400" dirty="0"/>
           </a:p>
@@ -1145,7 +1145,7 @@
                 <a:ea typeface="Yu Gothic UI" pitchFamily="34" charset="-122"/>
                 <a:cs typeface="Yu Gothic UI" pitchFamily="34" charset="-120"/>
               </a:rPr>
-              <a:t>AI に頼んで「ブランディング3軸」を反映した LP を世に出す</a:t>
+              <a:t>次回の公式LINE設定に「すぐ入れる」素材を、AIで一気に仕上げる</a:t>
             </a:r>
             <a:endParaRPr lang="en-US" sz="1600" dirty="0"/>
           </a:p>
@@ -1275,7 +1275,7 @@
                 <a:ea typeface="Yu Gothic UI Semibold" pitchFamily="34" charset="-122"/>
                 <a:cs typeface="Yu Gothic UI Semibold" pitchFamily="34" charset="-120"/>
               </a:rPr>
-              <a:t>演習1 LP のたたき台を Lovable で生成 — 解答・指導ポイント</a:t>
+              <a:t>演習1 LP/Webページを Lovable で自動生成 — 解答・指導ポイント</a:t>
             </a:r>
             <a:endParaRPr lang="en-US" sz="2200" dirty="0"/>
           </a:p>
@@ -1690,7 +1690,7 @@
                 <a:ea typeface="Yu Gothic UI" pitchFamily="34" charset="-122"/>
                 <a:cs typeface="Yu Gothic UI" pitchFamily="34" charset="-120"/>
               </a:rPr>
-              <a:t>・ヒーローセクション: 「家計と保障、両立できていますか?」のキャッチ+共感文</a:t>
+              <a:t>・ヒーローセクション:「家計と保障、両立できていますか?」のキャッチ+共感文</a:t>
             </a:r>
             <a:endParaRPr lang="en-US" sz="1150" dirty="0"/>
           </a:p>
@@ -1918,7 +1918,7 @@
                 <a:ea typeface="Yu Gothic UI" pitchFamily="34" charset="-122"/>
                 <a:cs typeface="Yu Gothic UI" pitchFamily="34" charset="-120"/>
               </a:rPr>
-              <a:t>・CTA文言が硬くなりがち。生徒同士で読み合って「自分なら押すか?」を口に出させる。</a:t>
+              <a:t>・LP URL の控えを忘れがち。スプシ「次回引き継ぎシート」を最後の3分で必ず記入させる。</a:t>
             </a:r>
             <a:endParaRPr lang="en-US" sz="1150" dirty="0"/>
           </a:p>
@@ -2009,7 +2009,7 @@
                 <a:ea typeface="Yu Gothic UI Semibold" pitchFamily="34" charset="-122"/>
                 <a:cs typeface="Yu Gothic UI Semibold" pitchFamily="34" charset="-120"/>
               </a:rPr>
-              <a:t>演習2 LP→公式LINE→面談予約 の動線を設計 — 解答・指導ポイント</a:t>
+              <a:t>演習2 公式LINE の構成を考える — 解答・指導ポイント</a:t>
             </a:r>
             <a:endParaRPr lang="en-US" sz="2200" dirty="0"/>
           </a:p>
@@ -2196,7 +2196,7 @@
                 <a:ea typeface="Yu Gothic UI" pitchFamily="34" charset="-122"/>
                 <a:cs typeface="Yu Gothic UI" pitchFamily="34" charset="-120"/>
               </a:rPr>
-              <a:t>私の公式LINEを AIDMA に沿って設計してください。</a:t>
+              <a:t>公式LINEを AIDMA で設計してください。</a:t>
             </a:r>
             <a:endParaRPr lang="en-US" sz="1150" dirty="0"/>
           </a:p>
@@ -2216,7 +2216,7 @@
                 <a:ea typeface="Yu Gothic UI" pitchFamily="34" charset="-122"/>
                 <a:cs typeface="Yu Gothic UI" pitchFamily="34" charset="-120"/>
               </a:rPr>
-              <a:t>LP の URL は ●●● 、ターゲットと3軸は次の通り… (3軸シートを貼る)</a:t>
+              <a:t>LP の URL: ●●● / ターゲット・3軸は次の通り…(3軸シートを貼る)</a:t>
             </a:r>
             <a:endParaRPr lang="en-US" sz="1150" dirty="0"/>
           </a:p>
@@ -2236,7 +2236,7 @@
                 <a:ea typeface="Yu Gothic UI" pitchFamily="34" charset="-122"/>
                 <a:cs typeface="Yu Gothic UI" pitchFamily="34" charset="-120"/>
               </a:rPr>
-              <a:t>AIDMAの各段階で「何を見せるか」「何を聞くか」を表形式で出してください。</a:t>
+              <a:t>次の項目を作ってください。</a:t>
             </a:r>
             <a:endParaRPr lang="en-US" sz="1150" dirty="0"/>
           </a:p>
@@ -2256,7 +2256,67 @@
                 <a:ea typeface="Yu Gothic UI" pitchFamily="34" charset="-122"/>
                 <a:cs typeface="Yu Gothic UI" pitchFamily="34" charset="-120"/>
               </a:rPr>
-              <a:t>面談予約までは3ステップに絞り、各ステップの目的を一文で書いてください。</a:t>
+              <a:t>  1) AIDMA5段階別の「何を見せる/何を聞く」表</a:t>
+            </a:r>
+            <a:endParaRPr lang="en-US" sz="1150" dirty="0"/>
+          </a:p>
+          <a:p>
+            <a:pPr indent="0" marL="0">
+              <a:spcAft>
+                <a:spcPts val="400"/>
+              </a:spcAft>
+              <a:buNone/>
+            </a:pPr>
+            <a:r>
+              <a:rPr lang="en-US" sz="1150" dirty="0">
+                <a:solidFill>
+                  <a:srgbClr val="1A1A1A"/>
+                </a:solidFill>
+                <a:latin typeface="Yu Gothic UI" pitchFamily="34" charset="0"/>
+                <a:ea typeface="Yu Gothic UI" pitchFamily="34" charset="-122"/>
+                <a:cs typeface="Yu Gothic UI" pitchFamily="34" charset="-120"/>
+              </a:rPr>
+              <a:t>  2) 登録直後のあいさつ自動応答文(1案)</a:t>
+            </a:r>
+            <a:endParaRPr lang="en-US" sz="1150" dirty="0"/>
+          </a:p>
+          <a:p>
+            <a:pPr indent="0" marL="0">
+              <a:spcAft>
+                <a:spcPts val="400"/>
+              </a:spcAft>
+              <a:buNone/>
+            </a:pPr>
+            <a:r>
+              <a:rPr lang="en-US" sz="1150" dirty="0">
+                <a:solidFill>
+                  <a:srgbClr val="1A1A1A"/>
+                </a:solidFill>
+                <a:latin typeface="Yu Gothic UI" pitchFamily="34" charset="0"/>
+                <a:ea typeface="Yu Gothic UI" pitchFamily="34" charset="-122"/>
+                <a:cs typeface="Yu Gothic UI" pitchFamily="34" charset="-120"/>
+              </a:rPr>
+              <a:t>  3) Day1〜Day3 のステップ配信本文(短文+改行多め、絵文字あり)</a:t>
+            </a:r>
+            <a:endParaRPr lang="en-US" sz="1150" dirty="0"/>
+          </a:p>
+          <a:p>
+            <a:pPr indent="0" marL="0">
+              <a:spcAft>
+                <a:spcPts val="400"/>
+              </a:spcAft>
+              <a:buNone/>
+            </a:pPr>
+            <a:r>
+              <a:rPr lang="en-US" sz="1150" dirty="0">
+                <a:solidFill>
+                  <a:srgbClr val="1A1A1A"/>
+                </a:solidFill>
+                <a:latin typeface="Yu Gothic UI" pitchFamily="34" charset="0"/>
+                <a:ea typeface="Yu Gothic UI" pitchFamily="34" charset="-122"/>
+                <a:cs typeface="Yu Gothic UI" pitchFamily="34" charset="-120"/>
+              </a:rPr>
+              <a:t>  4) 最後の予約案内文</a:t>
             </a:r>
             <a:endParaRPr lang="en-US" sz="1150" dirty="0"/>
           </a:p>
@@ -2404,7 +2464,7 @@
                 <a:ea typeface="Yu Gothic UI" pitchFamily="34" charset="-122"/>
                 <a:cs typeface="Yu Gothic UI" pitchFamily="34" charset="-120"/>
               </a:rPr>
-              <a:t>・自動応答(あいさつ)文案 1案</a:t>
+              <a:t>・あいさつ自動応答 1案</a:t>
             </a:r>
             <a:endParaRPr lang="en-US" sz="1150" dirty="0"/>
           </a:p>
@@ -2424,7 +2484,27 @@
                 <a:ea typeface="Yu Gothic UI" pitchFamily="34" charset="-122"/>
                 <a:cs typeface="Yu Gothic UI" pitchFamily="34" charset="-120"/>
               </a:rPr>
-              <a:t>・面談予約への遷移ステップ(登録 → 価値提示 → 予約案内)</a:t>
+              <a:t>・Day1〜Day3 配信本文(各300文字以内)</a:t>
+            </a:r>
+            <a:endParaRPr lang="en-US" sz="1150" dirty="0"/>
+          </a:p>
+          <a:p>
+            <a:pPr indent="0" marL="0">
+              <a:spcAft>
+                <a:spcPts val="400"/>
+              </a:spcAft>
+              <a:buNone/>
+            </a:pPr>
+            <a:r>
+              <a:rPr lang="en-US" sz="1150" dirty="0">
+                <a:solidFill>
+                  <a:srgbClr val="1A1A1A"/>
+                </a:solidFill>
+                <a:latin typeface="Yu Gothic UI" pitchFamily="34" charset="0"/>
+                <a:ea typeface="Yu Gothic UI" pitchFamily="34" charset="-122"/>
+                <a:cs typeface="Yu Gothic UI" pitchFamily="34" charset="-120"/>
+              </a:rPr>
+              <a:t>・予約案内文(URL+心理的ハードル低めの誘導)</a:t>
             </a:r>
             <a:endParaRPr lang="en-US" sz="1150" dirty="0"/>
           </a:p>
@@ -2552,7 +2632,7 @@
                 <a:ea typeface="Yu Gothic UI" pitchFamily="34" charset="-122"/>
                 <a:cs typeface="Yu Gothic UI" pitchFamily="34" charset="-120"/>
               </a:rPr>
-              <a:t>・「段階の違いを自分の言葉で説明できるか」を発表させると定着する。</a:t>
+              <a:t>・AIDMA の段階を「自分の言葉で説明」させると定着する。発表→相互ツッコミ。</a:t>
             </a:r>
             <a:endParaRPr lang="en-US" sz="1150" dirty="0"/>
           </a:p>
@@ -2572,7 +2652,7 @@
                 <a:ea typeface="Yu Gothic UI" pitchFamily="34" charset="-122"/>
                 <a:cs typeface="Yu Gothic UI" pitchFamily="34" charset="-120"/>
               </a:rPr>
-              <a:t>・離脱フォローの分岐を作ると複雑になりがち。最初は1分岐だけに絞らせる。</a:t>
+              <a:t>・配信本文がメルマガ調になりがち。「スマホで読むつもりで音読して」と再生成を促す。</a:t>
             </a:r>
             <a:endParaRPr lang="en-US" sz="1150" dirty="0"/>
           </a:p>
@@ -2592,7 +2672,7 @@
                 <a:ea typeface="Yu Gothic UI" pitchFamily="34" charset="-122"/>
                 <a:cs typeface="Yu Gothic UI" pitchFamily="34" charset="-120"/>
               </a:rPr>
-              <a:t>・面談予約ボタンは LP/LINE 両方に置く。「2回見せる」が原則と強調。</a:t>
+              <a:t>・次回設定で詰まらないよう、最終アウトプットは必ずスプシに保存させる(URL/各種文言)。</a:t>
             </a:r>
             <a:endParaRPr lang="en-US" sz="1150" dirty="0"/>
           </a:p>
